--- a/architecture/viewer-ecosystem.pptx
+++ b/architecture/viewer-ecosystem.pptx
@@ -262,7 +262,7 @@
           <a:p>
             <a:fld id="{77191D7D-AB0C-854E-97E0-BC94A1E8DDD6}" type="datetimeFigureOut">
               <a:rPr lang="en-DE" smtClean="0"/>
-              <a:t>9/15/26</a:t>
+              <a:t>9/16/26</a:t>
             </a:fld>
             <a:endParaRPr lang="en-DE"/>
           </a:p>
@@ -462,7 +462,7 @@
           <a:p>
             <a:fld id="{77191D7D-AB0C-854E-97E0-BC94A1E8DDD6}" type="datetimeFigureOut">
               <a:rPr lang="en-DE" smtClean="0"/>
-              <a:t>9/15/26</a:t>
+              <a:t>9/16/26</a:t>
             </a:fld>
             <a:endParaRPr lang="en-DE"/>
           </a:p>
@@ -672,7 +672,7 @@
           <a:p>
             <a:fld id="{77191D7D-AB0C-854E-97E0-BC94A1E8DDD6}" type="datetimeFigureOut">
               <a:rPr lang="en-DE" smtClean="0"/>
-              <a:t>9/15/26</a:t>
+              <a:t>9/16/26</a:t>
             </a:fld>
             <a:endParaRPr lang="en-DE"/>
           </a:p>
@@ -872,7 +872,7 @@
           <a:p>
             <a:fld id="{77191D7D-AB0C-854E-97E0-BC94A1E8DDD6}" type="datetimeFigureOut">
               <a:rPr lang="en-DE" smtClean="0"/>
-              <a:t>9/15/26</a:t>
+              <a:t>9/16/26</a:t>
             </a:fld>
             <a:endParaRPr lang="en-DE"/>
           </a:p>
@@ -1148,7 +1148,7 @@
           <a:p>
             <a:fld id="{77191D7D-AB0C-854E-97E0-BC94A1E8DDD6}" type="datetimeFigureOut">
               <a:rPr lang="en-DE" smtClean="0"/>
-              <a:t>9/15/26</a:t>
+              <a:t>9/16/26</a:t>
             </a:fld>
             <a:endParaRPr lang="en-DE"/>
           </a:p>
@@ -1416,7 +1416,7 @@
           <a:p>
             <a:fld id="{77191D7D-AB0C-854E-97E0-BC94A1E8DDD6}" type="datetimeFigureOut">
               <a:rPr lang="en-DE" smtClean="0"/>
-              <a:t>9/15/26</a:t>
+              <a:t>9/16/26</a:t>
             </a:fld>
             <a:endParaRPr lang="en-DE"/>
           </a:p>
@@ -1831,7 +1831,7 @@
           <a:p>
             <a:fld id="{77191D7D-AB0C-854E-97E0-BC94A1E8DDD6}" type="datetimeFigureOut">
               <a:rPr lang="en-DE" smtClean="0"/>
-              <a:t>9/15/26</a:t>
+              <a:t>9/16/26</a:t>
             </a:fld>
             <a:endParaRPr lang="en-DE"/>
           </a:p>
@@ -1973,7 +1973,7 @@
           <a:p>
             <a:fld id="{77191D7D-AB0C-854E-97E0-BC94A1E8DDD6}" type="datetimeFigureOut">
               <a:rPr lang="en-DE" smtClean="0"/>
-              <a:t>9/15/26</a:t>
+              <a:t>9/16/26</a:t>
             </a:fld>
             <a:endParaRPr lang="en-DE"/>
           </a:p>
@@ -2086,7 +2086,7 @@
           <a:p>
             <a:fld id="{77191D7D-AB0C-854E-97E0-BC94A1E8DDD6}" type="datetimeFigureOut">
               <a:rPr lang="en-DE" smtClean="0"/>
-              <a:t>9/15/26</a:t>
+              <a:t>9/16/26</a:t>
             </a:fld>
             <a:endParaRPr lang="en-DE"/>
           </a:p>
@@ -2399,7 +2399,7 @@
           <a:p>
             <a:fld id="{77191D7D-AB0C-854E-97E0-BC94A1E8DDD6}" type="datetimeFigureOut">
               <a:rPr lang="en-DE" smtClean="0"/>
-              <a:t>9/15/26</a:t>
+              <a:t>9/16/26</a:t>
             </a:fld>
             <a:endParaRPr lang="en-DE"/>
           </a:p>
@@ -2688,7 +2688,7 @@
           <a:p>
             <a:fld id="{77191D7D-AB0C-854E-97E0-BC94A1E8DDD6}" type="datetimeFigureOut">
               <a:rPr lang="en-DE" smtClean="0"/>
-              <a:t>9/15/26</a:t>
+              <a:t>9/16/26</a:t>
             </a:fld>
             <a:endParaRPr lang="en-DE"/>
           </a:p>
@@ -2931,7 +2931,7 @@
           <a:p>
             <a:fld id="{77191D7D-AB0C-854E-97E0-BC94A1E8DDD6}" type="datetimeFigureOut">
               <a:rPr lang="en-DE" smtClean="0"/>
-              <a:t>9/15/26</a:t>
+              <a:t>9/16/26</a:t>
             </a:fld>
             <a:endParaRPr lang="en-DE"/>
           </a:p>
@@ -4063,7 +4063,7 @@
                 <a:ea typeface="+mn-ea"/>
                 <a:cs typeface="+mn-cs"/>
               </a:rPr>
-              <a:t>(0.6.3)</a:t>
+              <a:t>(0.6.5)</a:t>
             </a:r>
             <a:endParaRPr lang="en-DE" sz="1600" b="1" dirty="0">
               <a:solidFill>
@@ -8752,7 +8752,7 @@
           <a:p>
             <a:r>
               <a:rPr lang="en-US" dirty="0"/>
-              <a:t>2026-09-15</a:t>
+              <a:t>2026-09-16</a:t>
             </a:r>
           </a:p>
         </p:txBody>
@@ -9508,7 +9508,7 @@
                 <a:ea typeface="+mn-ea"/>
                 <a:cs typeface="+mn-cs"/>
               </a:rPr>
-              <a:t>(0.6.3)</a:t>
+              <a:t>(0.6.5)</a:t>
             </a:r>
             <a:endParaRPr lang="en-DE" sz="1600" b="1" dirty="0">
               <a:solidFill>
@@ -12867,7 +12867,7 @@
           <a:p>
             <a:r>
               <a:rPr lang="en-US" dirty="0"/>
-              <a:t>2026-09-15</a:t>
+              <a:t>2026-09-16</a:t>
             </a:r>
           </a:p>
         </p:txBody>

--- a/architecture/viewer-ecosystem.pptx
+++ b/architecture/viewer-ecosystem.pptx
@@ -6010,7 +6010,7 @@
                   <a:schemeClr val="bg1"/>
                 </a:solidFill>
               </a:rPr>
-              <a:t>Flask</a:t>
+              <a:t>Standalone</a:t>
             </a:r>
             <a:endParaRPr lang="en-DE" sz="1600" dirty="0">
               <a:solidFill>
@@ -11119,7 +11119,7 @@
                   <a:schemeClr val="bg1"/>
                 </a:solidFill>
               </a:rPr>
-              <a:t>Flask</a:t>
+              <a:t>Standalone</a:t>
             </a:r>
             <a:endParaRPr lang="en-DE" sz="1600" dirty="0">
               <a:solidFill>

--- a/architecture/viewer-ecosystem.pptx
+++ b/architecture/viewer-ecosystem.pptx
@@ -262,7 +262,7 @@
           <a:p>
             <a:fld id="{77191D7D-AB0C-854E-97E0-BC94A1E8DDD6}" type="datetimeFigureOut">
               <a:rPr lang="en-DE" smtClean="0"/>
-              <a:t>9/16/26</a:t>
+              <a:t>9/17/26</a:t>
             </a:fld>
             <a:endParaRPr lang="en-DE"/>
           </a:p>
@@ -462,7 +462,7 @@
           <a:p>
             <a:fld id="{77191D7D-AB0C-854E-97E0-BC94A1E8DDD6}" type="datetimeFigureOut">
               <a:rPr lang="en-DE" smtClean="0"/>
-              <a:t>9/16/26</a:t>
+              <a:t>9/17/26</a:t>
             </a:fld>
             <a:endParaRPr lang="en-DE"/>
           </a:p>
@@ -672,7 +672,7 @@
           <a:p>
             <a:fld id="{77191D7D-AB0C-854E-97E0-BC94A1E8DDD6}" type="datetimeFigureOut">
               <a:rPr lang="en-DE" smtClean="0"/>
-              <a:t>9/16/26</a:t>
+              <a:t>9/17/26</a:t>
             </a:fld>
             <a:endParaRPr lang="en-DE"/>
           </a:p>
@@ -872,7 +872,7 @@
           <a:p>
             <a:fld id="{77191D7D-AB0C-854E-97E0-BC94A1E8DDD6}" type="datetimeFigureOut">
               <a:rPr lang="en-DE" smtClean="0"/>
-              <a:t>9/16/26</a:t>
+              <a:t>9/17/26</a:t>
             </a:fld>
             <a:endParaRPr lang="en-DE"/>
           </a:p>
@@ -1148,7 +1148,7 @@
           <a:p>
             <a:fld id="{77191D7D-AB0C-854E-97E0-BC94A1E8DDD6}" type="datetimeFigureOut">
               <a:rPr lang="en-DE" smtClean="0"/>
-              <a:t>9/16/26</a:t>
+              <a:t>9/17/26</a:t>
             </a:fld>
             <a:endParaRPr lang="en-DE"/>
           </a:p>
@@ -1416,7 +1416,7 @@
           <a:p>
             <a:fld id="{77191D7D-AB0C-854E-97E0-BC94A1E8DDD6}" type="datetimeFigureOut">
               <a:rPr lang="en-DE" smtClean="0"/>
-              <a:t>9/16/26</a:t>
+              <a:t>9/17/26</a:t>
             </a:fld>
             <a:endParaRPr lang="en-DE"/>
           </a:p>
@@ -1831,7 +1831,7 @@
           <a:p>
             <a:fld id="{77191D7D-AB0C-854E-97E0-BC94A1E8DDD6}" type="datetimeFigureOut">
               <a:rPr lang="en-DE" smtClean="0"/>
-              <a:t>9/16/26</a:t>
+              <a:t>9/17/26</a:t>
             </a:fld>
             <a:endParaRPr lang="en-DE"/>
           </a:p>
@@ -1973,7 +1973,7 @@
           <a:p>
             <a:fld id="{77191D7D-AB0C-854E-97E0-BC94A1E8DDD6}" type="datetimeFigureOut">
               <a:rPr lang="en-DE" smtClean="0"/>
-              <a:t>9/16/26</a:t>
+              <a:t>9/17/26</a:t>
             </a:fld>
             <a:endParaRPr lang="en-DE"/>
           </a:p>
@@ -2086,7 +2086,7 @@
           <a:p>
             <a:fld id="{77191D7D-AB0C-854E-97E0-BC94A1E8DDD6}" type="datetimeFigureOut">
               <a:rPr lang="en-DE" smtClean="0"/>
-              <a:t>9/16/26</a:t>
+              <a:t>9/17/26</a:t>
             </a:fld>
             <a:endParaRPr lang="en-DE"/>
           </a:p>
@@ -2399,7 +2399,7 @@
           <a:p>
             <a:fld id="{77191D7D-AB0C-854E-97E0-BC94A1E8DDD6}" type="datetimeFigureOut">
               <a:rPr lang="en-DE" smtClean="0"/>
-              <a:t>9/16/26</a:t>
+              <a:t>9/17/26</a:t>
             </a:fld>
             <a:endParaRPr lang="en-DE"/>
           </a:p>
@@ -2688,7 +2688,7 @@
           <a:p>
             <a:fld id="{77191D7D-AB0C-854E-97E0-BC94A1E8DDD6}" type="datetimeFigureOut">
               <a:rPr lang="en-DE" smtClean="0"/>
-              <a:t>9/16/26</a:t>
+              <a:t>9/17/26</a:t>
             </a:fld>
             <a:endParaRPr lang="en-DE"/>
           </a:p>
@@ -2931,7 +2931,7 @@
           <a:p>
             <a:fld id="{77191D7D-AB0C-854E-97E0-BC94A1E8DDD6}" type="datetimeFigureOut">
               <a:rPr lang="en-DE" smtClean="0"/>
-              <a:t>9/16/26</a:t>
+              <a:t>9/17/26</a:t>
             </a:fld>
             <a:endParaRPr lang="en-DE"/>
           </a:p>
@@ -4063,7 +4063,7 @@
                 <a:ea typeface="+mn-ea"/>
                 <a:cs typeface="+mn-cs"/>
               </a:rPr>
-              <a:t>(0.6.5)</a:t>
+              <a:t>(0.7.0)</a:t>
             </a:r>
             <a:endParaRPr lang="en-DE" sz="1600" b="1" dirty="0">
               <a:solidFill>
@@ -4505,7 +4505,7 @@
                 <a:ea typeface="+mn-ea"/>
                 <a:cs typeface="+mn-cs"/>
               </a:rPr>
-              <a:t>(5.0.6)</a:t>
+              <a:t>(5.0.7)</a:t>
             </a:r>
             <a:endParaRPr lang="en-DE" sz="1000" b="1" dirty="0">
               <a:solidFill>
@@ -8752,7 +8752,7 @@
           <a:p>
             <a:r>
               <a:rPr lang="en-US" dirty="0"/>
-              <a:t>2026-09-16</a:t>
+              <a:t>2026-09-17</a:t>
             </a:r>
           </a:p>
         </p:txBody>
@@ -9508,7 +9508,7 @@
                 <a:ea typeface="+mn-ea"/>
                 <a:cs typeface="+mn-cs"/>
               </a:rPr>
-              <a:t>(0.6.5)</a:t>
+              <a:t>(0.7.0)</a:t>
             </a:r>
             <a:endParaRPr lang="en-DE" sz="1600" b="1" dirty="0">
               <a:solidFill>
@@ -9950,7 +9950,7 @@
                 <a:ea typeface="+mn-ea"/>
                 <a:cs typeface="+mn-cs"/>
               </a:rPr>
-              <a:t>(5.0.6)</a:t>
+              <a:t>(5.0.7)</a:t>
             </a:r>
             <a:endParaRPr lang="en-DE" sz="1000" b="1" dirty="0">
               <a:solidFill>
@@ -12867,7 +12867,7 @@
           <a:p>
             <a:r>
               <a:rPr lang="en-US" dirty="0"/>
-              <a:t>2026-09-16</a:t>
+              <a:t>2026-09-17</a:t>
             </a:r>
           </a:p>
         </p:txBody>

--- a/architecture/viewer-ecosystem.pptx
+++ b/architecture/viewer-ecosystem.pptx
@@ -262,7 +262,7 @@
           <a:p>
             <a:fld id="{77191D7D-AB0C-854E-97E0-BC94A1E8DDD6}" type="datetimeFigureOut">
               <a:rPr lang="en-DE" smtClean="0"/>
-              <a:t>9/17/26</a:t>
+              <a:t>9/18/26</a:t>
             </a:fld>
             <a:endParaRPr lang="en-DE"/>
           </a:p>
@@ -462,7 +462,7 @@
           <a:p>
             <a:fld id="{77191D7D-AB0C-854E-97E0-BC94A1E8DDD6}" type="datetimeFigureOut">
               <a:rPr lang="en-DE" smtClean="0"/>
-              <a:t>9/17/26</a:t>
+              <a:t>9/18/26</a:t>
             </a:fld>
             <a:endParaRPr lang="en-DE"/>
           </a:p>
@@ -672,7 +672,7 @@
           <a:p>
             <a:fld id="{77191D7D-AB0C-854E-97E0-BC94A1E8DDD6}" type="datetimeFigureOut">
               <a:rPr lang="en-DE" smtClean="0"/>
-              <a:t>9/17/26</a:t>
+              <a:t>9/18/26</a:t>
             </a:fld>
             <a:endParaRPr lang="en-DE"/>
           </a:p>
@@ -872,7 +872,7 @@
           <a:p>
             <a:fld id="{77191D7D-AB0C-854E-97E0-BC94A1E8DDD6}" type="datetimeFigureOut">
               <a:rPr lang="en-DE" smtClean="0"/>
-              <a:t>9/17/26</a:t>
+              <a:t>9/18/26</a:t>
             </a:fld>
             <a:endParaRPr lang="en-DE"/>
           </a:p>
@@ -1148,7 +1148,7 @@
           <a:p>
             <a:fld id="{77191D7D-AB0C-854E-97E0-BC94A1E8DDD6}" type="datetimeFigureOut">
               <a:rPr lang="en-DE" smtClean="0"/>
-              <a:t>9/17/26</a:t>
+              <a:t>9/18/26</a:t>
             </a:fld>
             <a:endParaRPr lang="en-DE"/>
           </a:p>
@@ -1416,7 +1416,7 @@
           <a:p>
             <a:fld id="{77191D7D-AB0C-854E-97E0-BC94A1E8DDD6}" type="datetimeFigureOut">
               <a:rPr lang="en-DE" smtClean="0"/>
-              <a:t>9/17/26</a:t>
+              <a:t>9/18/26</a:t>
             </a:fld>
             <a:endParaRPr lang="en-DE"/>
           </a:p>
@@ -1831,7 +1831,7 @@
           <a:p>
             <a:fld id="{77191D7D-AB0C-854E-97E0-BC94A1E8DDD6}" type="datetimeFigureOut">
               <a:rPr lang="en-DE" smtClean="0"/>
-              <a:t>9/17/26</a:t>
+              <a:t>9/18/26</a:t>
             </a:fld>
             <a:endParaRPr lang="en-DE"/>
           </a:p>
@@ -1973,7 +1973,7 @@
           <a:p>
             <a:fld id="{77191D7D-AB0C-854E-97E0-BC94A1E8DDD6}" type="datetimeFigureOut">
               <a:rPr lang="en-DE" smtClean="0"/>
-              <a:t>9/17/26</a:t>
+              <a:t>9/18/26</a:t>
             </a:fld>
             <a:endParaRPr lang="en-DE"/>
           </a:p>
@@ -2086,7 +2086,7 @@
           <a:p>
             <a:fld id="{77191D7D-AB0C-854E-97E0-BC94A1E8DDD6}" type="datetimeFigureOut">
               <a:rPr lang="en-DE" smtClean="0"/>
-              <a:t>9/17/26</a:t>
+              <a:t>9/18/26</a:t>
             </a:fld>
             <a:endParaRPr lang="en-DE"/>
           </a:p>
@@ -2399,7 +2399,7 @@
           <a:p>
             <a:fld id="{77191D7D-AB0C-854E-97E0-BC94A1E8DDD6}" type="datetimeFigureOut">
               <a:rPr lang="en-DE" smtClean="0"/>
-              <a:t>9/17/26</a:t>
+              <a:t>9/18/26</a:t>
             </a:fld>
             <a:endParaRPr lang="en-DE"/>
           </a:p>
@@ -2688,7 +2688,7 @@
           <a:p>
             <a:fld id="{77191D7D-AB0C-854E-97E0-BC94A1E8DDD6}" type="datetimeFigureOut">
               <a:rPr lang="en-DE" smtClean="0"/>
-              <a:t>9/17/26</a:t>
+              <a:t>9/18/26</a:t>
             </a:fld>
             <a:endParaRPr lang="en-DE"/>
           </a:p>
@@ -2931,7 +2931,7 @@
           <a:p>
             <a:fld id="{77191D7D-AB0C-854E-97E0-BC94A1E8DDD6}" type="datetimeFigureOut">
               <a:rPr lang="en-DE" smtClean="0"/>
-              <a:t>9/17/26</a:t>
+              <a:t>9/18/26</a:t>
             </a:fld>
             <a:endParaRPr lang="en-DE"/>
           </a:p>
@@ -4063,7 +4063,7 @@
                 <a:ea typeface="+mn-ea"/>
                 <a:cs typeface="+mn-cs"/>
               </a:rPr>
-              <a:t>(0.7.0)</a:t>
+              <a:t>(0.7.1)</a:t>
             </a:r>
             <a:endParaRPr lang="en-DE" sz="1600" b="1" dirty="0">
               <a:solidFill>
@@ -8752,7 +8752,7 @@
           <a:p>
             <a:r>
               <a:rPr lang="en-US" dirty="0"/>
-              <a:t>2026-09-17</a:t>
+              <a:t>2026-09-18</a:t>
             </a:r>
           </a:p>
         </p:txBody>
@@ -9508,7 +9508,7 @@
                 <a:ea typeface="+mn-ea"/>
                 <a:cs typeface="+mn-cs"/>
               </a:rPr>
-              <a:t>(0.7.0)</a:t>
+              <a:t>(0.7.1)</a:t>
             </a:r>
             <a:endParaRPr lang="en-DE" sz="1600" b="1" dirty="0">
               <a:solidFill>
@@ -12867,7 +12867,7 @@
           <a:p>
             <a:r>
               <a:rPr lang="en-US" dirty="0"/>
-              <a:t>2026-09-17</a:t>
+              <a:t>2026-09-18</a:t>
             </a:r>
           </a:p>
         </p:txBody>

--- a/architecture/viewer-ecosystem.pptx
+++ b/architecture/viewer-ecosystem.pptx
@@ -262,7 +262,7 @@
           <a:p>
             <a:fld id="{77191D7D-AB0C-854E-97E0-BC94A1E8DDD6}" type="datetimeFigureOut">
               <a:rPr lang="en-DE" smtClean="0"/>
-              <a:t>9/18/26</a:t>
+              <a:t>9/21/26</a:t>
             </a:fld>
             <a:endParaRPr lang="en-DE"/>
           </a:p>
@@ -462,7 +462,7 @@
           <a:p>
             <a:fld id="{77191D7D-AB0C-854E-97E0-BC94A1E8DDD6}" type="datetimeFigureOut">
               <a:rPr lang="en-DE" smtClean="0"/>
-              <a:t>9/18/26</a:t>
+              <a:t>9/21/26</a:t>
             </a:fld>
             <a:endParaRPr lang="en-DE"/>
           </a:p>
@@ -672,7 +672,7 @@
           <a:p>
             <a:fld id="{77191D7D-AB0C-854E-97E0-BC94A1E8DDD6}" type="datetimeFigureOut">
               <a:rPr lang="en-DE" smtClean="0"/>
-              <a:t>9/18/26</a:t>
+              <a:t>9/21/26</a:t>
             </a:fld>
             <a:endParaRPr lang="en-DE"/>
           </a:p>
@@ -872,7 +872,7 @@
           <a:p>
             <a:fld id="{77191D7D-AB0C-854E-97E0-BC94A1E8DDD6}" type="datetimeFigureOut">
               <a:rPr lang="en-DE" smtClean="0"/>
-              <a:t>9/18/26</a:t>
+              <a:t>9/21/26</a:t>
             </a:fld>
             <a:endParaRPr lang="en-DE"/>
           </a:p>
@@ -1148,7 +1148,7 @@
           <a:p>
             <a:fld id="{77191D7D-AB0C-854E-97E0-BC94A1E8DDD6}" type="datetimeFigureOut">
               <a:rPr lang="en-DE" smtClean="0"/>
-              <a:t>9/18/26</a:t>
+              <a:t>9/21/26</a:t>
             </a:fld>
             <a:endParaRPr lang="en-DE"/>
           </a:p>
@@ -1416,7 +1416,7 @@
           <a:p>
             <a:fld id="{77191D7D-AB0C-854E-97E0-BC94A1E8DDD6}" type="datetimeFigureOut">
               <a:rPr lang="en-DE" smtClean="0"/>
-              <a:t>9/18/26</a:t>
+              <a:t>9/21/26</a:t>
             </a:fld>
             <a:endParaRPr lang="en-DE"/>
           </a:p>
@@ -1831,7 +1831,7 @@
           <a:p>
             <a:fld id="{77191D7D-AB0C-854E-97E0-BC94A1E8DDD6}" type="datetimeFigureOut">
               <a:rPr lang="en-DE" smtClean="0"/>
-              <a:t>9/18/26</a:t>
+              <a:t>9/21/26</a:t>
             </a:fld>
             <a:endParaRPr lang="en-DE"/>
           </a:p>
@@ -1973,7 +1973,7 @@
           <a:p>
             <a:fld id="{77191D7D-AB0C-854E-97E0-BC94A1E8DDD6}" type="datetimeFigureOut">
               <a:rPr lang="en-DE" smtClean="0"/>
-              <a:t>9/18/26</a:t>
+              <a:t>9/21/26</a:t>
             </a:fld>
             <a:endParaRPr lang="en-DE"/>
           </a:p>
@@ -2086,7 +2086,7 @@
           <a:p>
             <a:fld id="{77191D7D-AB0C-854E-97E0-BC94A1E8DDD6}" type="datetimeFigureOut">
               <a:rPr lang="en-DE" smtClean="0"/>
-              <a:t>9/18/26</a:t>
+              <a:t>9/21/26</a:t>
             </a:fld>
             <a:endParaRPr lang="en-DE"/>
           </a:p>
@@ -2399,7 +2399,7 @@
           <a:p>
             <a:fld id="{77191D7D-AB0C-854E-97E0-BC94A1E8DDD6}" type="datetimeFigureOut">
               <a:rPr lang="en-DE" smtClean="0"/>
-              <a:t>9/18/26</a:t>
+              <a:t>9/21/26</a:t>
             </a:fld>
             <a:endParaRPr lang="en-DE"/>
           </a:p>
@@ -2688,7 +2688,7 @@
           <a:p>
             <a:fld id="{77191D7D-AB0C-854E-97E0-BC94A1E8DDD6}" type="datetimeFigureOut">
               <a:rPr lang="en-DE" smtClean="0"/>
-              <a:t>9/18/26</a:t>
+              <a:t>9/21/26</a:t>
             </a:fld>
             <a:endParaRPr lang="en-DE"/>
           </a:p>
@@ -2931,7 +2931,7 @@
           <a:p>
             <a:fld id="{77191D7D-AB0C-854E-97E0-BC94A1E8DDD6}" type="datetimeFigureOut">
               <a:rPr lang="en-DE" smtClean="0"/>
-              <a:t>9/18/26</a:t>
+              <a:t>9/21/26</a:t>
             </a:fld>
             <a:endParaRPr lang="en-DE"/>
           </a:p>
@@ -4063,7 +4063,7 @@
                 <a:ea typeface="+mn-ea"/>
                 <a:cs typeface="+mn-cs"/>
               </a:rPr>
-              <a:t>(0.7.1)</a:t>
+              <a:t>(0.8.0)</a:t>
             </a:r>
             <a:endParaRPr lang="en-DE" sz="1600" b="1" dirty="0">
               <a:solidFill>
@@ -9491,7 +9491,7 @@
               </a:rPr>
             </a:br>
             <a:r>
-              <a:rPr kumimoji="0" lang="de-DE" sz="1000" b="1" i="0" u="none" strike="noStrike" kern="1200" cap="none" spc="0" normalizeH="0" baseline="0" noProof="0" dirty="0">
+              <a:rPr kumimoji="0" lang="de-DE" sz="1000" b="1" i="0" u="none" strike="noStrike" kern="1200" cap="none" spc="0" normalizeH="0" baseline="0" noProof="0">
                 <a:ln>
                   <a:noFill/>
                 </a:ln>
@@ -9508,7 +9508,7 @@
                 <a:ea typeface="+mn-ea"/>
                 <a:cs typeface="+mn-cs"/>
               </a:rPr>
-              <a:t>(0.7.1)</a:t>
+              <a:t>(0.8.0)</a:t>
             </a:r>
             <a:endParaRPr lang="en-DE" sz="1600" b="1" dirty="0">
               <a:solidFill>

--- a/architecture/viewer-ecosystem.pptx
+++ b/architecture/viewer-ecosystem.pptx
@@ -262,7 +262,7 @@
           <a:p>
             <a:fld id="{77191D7D-AB0C-854E-97E0-BC94A1E8DDD6}" type="datetimeFigureOut">
               <a:rPr lang="en-DE" smtClean="0"/>
-              <a:t>9/21/26</a:t>
+              <a:t>13.10.26</a:t>
             </a:fld>
             <a:endParaRPr lang="en-DE"/>
           </a:p>
@@ -462,7 +462,7 @@
           <a:p>
             <a:fld id="{77191D7D-AB0C-854E-97E0-BC94A1E8DDD6}" type="datetimeFigureOut">
               <a:rPr lang="en-DE" smtClean="0"/>
-              <a:t>9/21/26</a:t>
+              <a:t>13.10.26</a:t>
             </a:fld>
             <a:endParaRPr lang="en-DE"/>
           </a:p>
@@ -672,7 +672,7 @@
           <a:p>
             <a:fld id="{77191D7D-AB0C-854E-97E0-BC94A1E8DDD6}" type="datetimeFigureOut">
               <a:rPr lang="en-DE" smtClean="0"/>
-              <a:t>9/21/26</a:t>
+              <a:t>13.10.26</a:t>
             </a:fld>
             <a:endParaRPr lang="en-DE"/>
           </a:p>
@@ -872,7 +872,7 @@
           <a:p>
             <a:fld id="{77191D7D-AB0C-854E-97E0-BC94A1E8DDD6}" type="datetimeFigureOut">
               <a:rPr lang="en-DE" smtClean="0"/>
-              <a:t>9/21/26</a:t>
+              <a:t>13.10.26</a:t>
             </a:fld>
             <a:endParaRPr lang="en-DE"/>
           </a:p>
@@ -1148,7 +1148,7 @@
           <a:p>
             <a:fld id="{77191D7D-AB0C-854E-97E0-BC94A1E8DDD6}" type="datetimeFigureOut">
               <a:rPr lang="en-DE" smtClean="0"/>
-              <a:t>9/21/26</a:t>
+              <a:t>13.10.26</a:t>
             </a:fld>
             <a:endParaRPr lang="en-DE"/>
           </a:p>
@@ -1416,7 +1416,7 @@
           <a:p>
             <a:fld id="{77191D7D-AB0C-854E-97E0-BC94A1E8DDD6}" type="datetimeFigureOut">
               <a:rPr lang="en-DE" smtClean="0"/>
-              <a:t>9/21/26</a:t>
+              <a:t>13.10.26</a:t>
             </a:fld>
             <a:endParaRPr lang="en-DE"/>
           </a:p>
@@ -1831,7 +1831,7 @@
           <a:p>
             <a:fld id="{77191D7D-AB0C-854E-97E0-BC94A1E8DDD6}" type="datetimeFigureOut">
               <a:rPr lang="en-DE" smtClean="0"/>
-              <a:t>9/21/26</a:t>
+              <a:t>13.10.26</a:t>
             </a:fld>
             <a:endParaRPr lang="en-DE"/>
           </a:p>
@@ -1973,7 +1973,7 @@
           <a:p>
             <a:fld id="{77191D7D-AB0C-854E-97E0-BC94A1E8DDD6}" type="datetimeFigureOut">
               <a:rPr lang="en-DE" smtClean="0"/>
-              <a:t>9/21/26</a:t>
+              <a:t>13.10.26</a:t>
             </a:fld>
             <a:endParaRPr lang="en-DE"/>
           </a:p>
@@ -2086,7 +2086,7 @@
           <a:p>
             <a:fld id="{77191D7D-AB0C-854E-97E0-BC94A1E8DDD6}" type="datetimeFigureOut">
               <a:rPr lang="en-DE" smtClean="0"/>
-              <a:t>9/21/26</a:t>
+              <a:t>13.10.26</a:t>
             </a:fld>
             <a:endParaRPr lang="en-DE"/>
           </a:p>
@@ -2399,7 +2399,7 @@
           <a:p>
             <a:fld id="{77191D7D-AB0C-854E-97E0-BC94A1E8DDD6}" type="datetimeFigureOut">
               <a:rPr lang="en-DE" smtClean="0"/>
-              <a:t>9/21/26</a:t>
+              <a:t>13.10.26</a:t>
             </a:fld>
             <a:endParaRPr lang="en-DE"/>
           </a:p>
@@ -2688,7 +2688,7 @@
           <a:p>
             <a:fld id="{77191D7D-AB0C-854E-97E0-BC94A1E8DDD6}" type="datetimeFigureOut">
               <a:rPr lang="en-DE" smtClean="0"/>
-              <a:t>9/21/26</a:t>
+              <a:t>13.10.26</a:t>
             </a:fld>
             <a:endParaRPr lang="en-DE"/>
           </a:p>
@@ -2931,7 +2931,7 @@
           <a:p>
             <a:fld id="{77191D7D-AB0C-854E-97E0-BC94A1E8DDD6}" type="datetimeFigureOut">
               <a:rPr lang="en-DE" smtClean="0"/>
-              <a:t>9/21/26</a:t>
+              <a:t>13.10.26</a:t>
             </a:fld>
             <a:endParaRPr lang="en-DE"/>
           </a:p>
@@ -3493,7 +3493,7 @@
                 <a:ea typeface="+mn-ea"/>
                 <a:cs typeface="+mn-cs"/>
               </a:rPr>
-              <a:t>(1.0.13)</a:t>
+              <a:t>(1.1.2)</a:t>
             </a:r>
             <a:endParaRPr lang="en-DE" sz="1600" b="1" dirty="0">
               <a:solidFill>
@@ -3630,7 +3630,7 @@
                   </a:schemeClr>
                 </a:solidFill>
               </a:rPr>
-              <a:t>(1.1.3)</a:t>
+              <a:t>(1.2.0)</a:t>
             </a:r>
             <a:endParaRPr lang="en-DE" sz="1000" b="1" dirty="0">
               <a:solidFill>
@@ -3739,7 +3739,7 @@
                 <a:ea typeface="+mn-ea"/>
                 <a:cs typeface="+mn-cs"/>
               </a:rPr>
-              <a:t>(5.1.0)</a:t>
+              <a:t>(5.2.0)</a:t>
             </a:r>
             <a:endParaRPr lang="en-DE" sz="1600" b="1" dirty="0">
               <a:solidFill>
@@ -3845,7 +3845,7 @@
                 <a:ea typeface="+mn-ea"/>
                 <a:cs typeface="+mn-cs"/>
               </a:rPr>
-              <a:t>(4.1.5)</a:t>
+              <a:t>(4.2.0)</a:t>
             </a:r>
             <a:endParaRPr lang="en-DE" sz="1600" b="1" dirty="0">
               <a:solidFill>
@@ -3954,7 +3954,7 @@
                 <a:ea typeface="+mn-ea"/>
                 <a:cs typeface="+mn-cs"/>
               </a:rPr>
-              <a:t>(4.1.0)</a:t>
+              <a:t>(4.2.0)</a:t>
             </a:r>
             <a:endParaRPr lang="en-DE" sz="1600" dirty="0">
               <a:solidFill>
@@ -4063,7 +4063,7 @@
                 <a:ea typeface="+mn-ea"/>
                 <a:cs typeface="+mn-cs"/>
               </a:rPr>
-              <a:t>(0.8.0)</a:t>
+              <a:t>(0.9.0)</a:t>
             </a:r>
             <a:endParaRPr lang="en-DE" sz="1600" b="1" dirty="0">
               <a:solidFill>
@@ -4169,7 +4169,7 @@
                 <a:ea typeface="+mn-ea"/>
                 <a:cs typeface="+mn-cs"/>
               </a:rPr>
-              <a:t>(3.5.3)</a:t>
+              <a:t>(3.6.2)</a:t>
             </a:r>
             <a:endParaRPr lang="en-DE" sz="1600" b="1" dirty="0">
               <a:solidFill>
@@ -4505,7 +4505,7 @@
                 <a:ea typeface="+mn-ea"/>
                 <a:cs typeface="+mn-cs"/>
               </a:rPr>
-              <a:t>(5.0.7)</a:t>
+              <a:t>(5.1.3)</a:t>
             </a:r>
             <a:endParaRPr lang="en-DE" sz="1000" b="1" dirty="0">
               <a:solidFill>
@@ -4658,7 +4658,7 @@
                 <a:ea typeface="+mn-ea"/>
                 <a:cs typeface="+mn-cs"/>
               </a:rPr>
-              <a:t>(1.0.4)</a:t>
+              <a:t>(1.1.0)</a:t>
             </a:r>
             <a:endParaRPr lang="en-DE" sz="1600" b="1" dirty="0">
               <a:solidFill>
@@ -5836,7 +5836,7 @@
                 <a:ea typeface="+mn-ea"/>
                 <a:cs typeface="+mn-cs"/>
               </a:rPr>
-              <a:t>(4.1.5)</a:t>
+              <a:t>(4.2.0)</a:t>
             </a:r>
             <a:endParaRPr lang="en-DE" sz="1600" b="1" dirty="0">
               <a:solidFill>
@@ -8737,7 +8737,7 @@
         <p:spPr>
           <a:xfrm>
             <a:off x="296902" y="298533"/>
-            <a:ext cx="1311834" cy="369332"/>
+            <a:ext cx="1294457" cy="369332"/>
           </a:xfrm>
           <a:prstGeom prst="rect">
             <a:avLst/>
@@ -8752,7 +8752,7 @@
           <a:p>
             <a:r>
               <a:rPr lang="en-US" dirty="0"/>
-              <a:t>2026-09-18</a:t>
+              <a:t>2026-10-13</a:t>
             </a:r>
           </a:p>
         </p:txBody>

--- a/architecture/viewer-ecosystem.pptx
+++ b/architecture/viewer-ecosystem.pptx
@@ -11577,7 +11577,7 @@
         </p:nvSpPr>
         <p:spPr>
           <a:xfrm>
-            <a:off x="10757022" y="6416175"/>
+            <a:off x="10571554" y="6416175"/>
             <a:ext cx="1294457" cy="369332"/>
           </a:xfrm>
           <a:prstGeom prst="rect">
@@ -11592,10 +11592,9 @@
           <a:lstStyle/>
           <a:p>
             <a:r>
-              <a:rPr lang="en-US"/>
+              <a:rPr lang="en-US" dirty="0"/>
               <a:t>2026-10-19</a:t>
             </a:r>
-            <a:endParaRPr lang="en-US" dirty="0"/>
           </a:p>
         </p:txBody>
       </p:sp>
